--- a/e2e/fixtures/files/deck-4x3.pptx
+++ b/e2e/fixtures/files/deck-4x3.pptx
@@ -3109,7 +3109,7 @@
           <a:lstStyle/>
           <a:p>
             <a:r>
-              <a:t>Итоги полугодия</a:t>
+              <a:t>Краткая сводка</a:t>
             </a:r>
           </a:p>
         </p:txBody>
@@ -3130,7 +3130,7 @@
           <a:lstStyle/>
           <a:p>
             <a:r>
-              <a:t>ООО «Ромашка» · январь 2026</a:t>
+              <a:t>Формат 4:3 · ООО «Ромашка» · январь 2024</a:t>
             </a:r>
           </a:p>
         </p:txBody>
@@ -3169,7 +3169,7 @@
           <a:lstStyle/>
           <a:p>
             <a:r>
-              <a:t>Раздел 1</a:t>
+              <a:t>Итоги квартала</a:t>
             </a:r>
           </a:p>
         </p:txBody>
@@ -3190,23 +3190,19 @@
           <a:lstStyle/>
           <a:p>
             <a:r>
-              <a:t>Ключевой показатель 1</a:t>
-            </a:r>
-          </a:p>
-          <a:p>
-            <a:pPr lvl="1">
-              <a:defRPr sz="1800"/>
-            </a:pPr>
-            <a:r>
-              <a:t>Пояснение 1.1</a:t>
-            </a:r>
-          </a:p>
-          <a:p>
-            <a:pPr lvl="1">
-              <a:defRPr sz="1800"/>
-            </a:pPr>
-            <a:r>
-              <a:t>Пояснение 1.2</a:t>
+              <a:t>Выручка выросла на 12% к предыдущему кварталу</a:t>
+            </a:r>
+          </a:p>
+          <a:p>
+            <a:pPr lvl="1"/>
+            <a:r>
+              <a:t>Подписано 8 новых договоров</a:t>
+            </a:r>
+          </a:p>
+          <a:p>
+            <a:pPr lvl="1"/>
+            <a:r>
+              <a:t>Средний срок согласования — 6 рабочих дней</a:t>
             </a:r>
           </a:p>
         </p:txBody>
@@ -3245,7 +3241,7 @@
           <a:lstStyle/>
           <a:p>
             <a:r>
-              <a:t>Раздел 2</a:t>
+              <a:t>Структура портфеля</a:t>
             </a:r>
           </a:p>
         </p:txBody>
@@ -3266,23 +3262,19 @@
           <a:lstStyle/>
           <a:p>
             <a:r>
-              <a:t>Ключевой показатель 2</a:t>
-            </a:r>
-          </a:p>
-          <a:p>
-            <a:pPr lvl="1">
-              <a:defRPr sz="1800"/>
-            </a:pPr>
-            <a:r>
-              <a:t>Пояснение 2.1</a:t>
-            </a:r>
-          </a:p>
-          <a:p>
-            <a:pPr lvl="1">
-              <a:defRPr sz="1800"/>
-            </a:pPr>
-            <a:r>
-              <a:t>Пояснение 2.2</a:t>
+              <a:t>Услуги — 54%</a:t>
+            </a:r>
+          </a:p>
+          <a:p>
+            <a:pPr lvl="1"/>
+            <a:r>
+              <a:t>Поставка — 31%</a:t>
+            </a:r>
+          </a:p>
+          <a:p>
+            <a:pPr lvl="1"/>
+            <a:r>
+              <a:t>Аренда — 15%</a:t>
             </a:r>
           </a:p>
         </p:txBody>
@@ -3321,7 +3313,7 @@
           <a:lstStyle/>
           <a:p>
             <a:r>
-              <a:t>Раздел 3</a:t>
+              <a:t>Ключевые контрагенты</a:t>
             </a:r>
           </a:p>
         </p:txBody>
@@ -3342,23 +3334,19 @@
           <a:lstStyle/>
           <a:p>
             <a:r>
-              <a:t>Ключевой показатель 3</a:t>
-            </a:r>
-          </a:p>
-          <a:p>
-            <a:pPr lvl="1">
-              <a:defRPr sz="1800"/>
-            </a:pPr>
-            <a:r>
-              <a:t>Пояснение 3.1</a:t>
-            </a:r>
-          </a:p>
-          <a:p>
-            <a:pPr lvl="1">
-              <a:defRPr sz="1800"/>
-            </a:pPr>
-            <a:r>
-              <a:t>Пояснение 3.2</a:t>
+              <a:t>ООО «Василёк»</a:t>
+            </a:r>
+          </a:p>
+          <a:p>
+            <a:pPr lvl="1"/>
+            <a:r>
+              <a:t>ЗАО «Тестовый Мост»</a:t>
+            </a:r>
+          </a:p>
+          <a:p>
+            <a:pPr lvl="1"/>
+            <a:r>
+              <a:t>ООО «ТехноСфера-Плюс»</a:t>
             </a:r>
           </a:p>
         </p:txBody>
@@ -3397,7 +3385,7 @@
           <a:lstStyle/>
           <a:p>
             <a:r>
-              <a:t>Раздел 4</a:t>
+              <a:t>Просроченная задолженность</a:t>
             </a:r>
           </a:p>
         </p:txBody>
@@ -3418,23 +3406,19 @@
           <a:lstStyle/>
           <a:p>
             <a:r>
-              <a:t>Ключевой показатель 4</a:t>
-            </a:r>
-          </a:p>
-          <a:p>
-            <a:pPr lvl="1">
-              <a:defRPr sz="1800"/>
-            </a:pPr>
-            <a:r>
-              <a:t>Пояснение 4.1</a:t>
-            </a:r>
-          </a:p>
-          <a:p>
-            <a:pPr lvl="1">
-              <a:defRPr sz="1800"/>
-            </a:pPr>
-            <a:r>
-              <a:t>Пояснение 4.2</a:t>
+              <a:t>Всего 4 договора</a:t>
+            </a:r>
+          </a:p>
+          <a:p>
+            <a:pPr lvl="1"/>
+            <a:r>
+              <a:t>Средний срок просрочки — 11 дней</a:t>
+            </a:r>
+          </a:p>
+          <a:p>
+            <a:pPr lvl="1"/>
+            <a:r>
+              <a:t>Претензионная работа начата по 3 из 4</a:t>
             </a:r>
           </a:p>
         </p:txBody>
@@ -3473,48 +3457,309 @@
           <a:lstStyle/>
           <a:p>
             <a:r>
-              <a:t>Раздел 5</a:t>
-            </a:r>
-          </a:p>
-        </p:txBody>
-      </p:sp>
-      <p:sp>
-        <p:nvSpPr>
-          <p:cNvPr id="3" name="Content Placeholder 2"/>
-          <p:cNvSpPr>
-            <a:spLocks noGrp="1"/>
-          </p:cNvSpPr>
-          <p:nvPr>
-            <p:ph idx="1"/>
-          </p:nvPr>
-        </p:nvSpPr>
-        <p:spPr/>
-        <p:txBody>
-          <a:bodyPr/>
-          <a:lstStyle/>
-          <a:p>
-            <a:r>
-              <a:t>Ключевой показатель 5</a:t>
-            </a:r>
-          </a:p>
-          <a:p>
-            <a:pPr lvl="1">
-              <a:defRPr sz="1800"/>
-            </a:pPr>
-            <a:r>
-              <a:t>Пояснение 5.1</a:t>
-            </a:r>
-          </a:p>
-          <a:p>
-            <a:pPr lvl="1">
-              <a:defRPr sz="1800"/>
-            </a:pPr>
-            <a:r>
-              <a:t>Пояснение 5.2</a:t>
-            </a:r>
-          </a:p>
-        </p:txBody>
-      </p:sp>
+              <a:t>Договоры на контроле</a:t>
+            </a:r>
+          </a:p>
+        </p:txBody>
+      </p:sp>
+      <p:graphicFrame>
+        <p:nvGraphicFramePr>
+          <p:cNvPr id="3" name="Table 2"/>
+          <p:cNvGraphicFramePr>
+            <a:graphicFrameLocks noGrp="1"/>
+          </p:cNvGraphicFramePr>
+          <p:nvPr/>
+        </p:nvGraphicFramePr>
+        <p:xfrm>
+          <a:off x="720000" y="1440000"/>
+          <a:ext cx="7704000" cy="2880000"/>
+        </p:xfrm>
+        <a:graphic>
+          <a:graphicData uri="http://schemas.openxmlformats.org/drawingml/2006/table">
+            <a:tbl>
+              <a:tblPr firstRow="1" bandRow="1">
+                <a:tableStyleId>{5C22544A-7EE6-4342-B048-85BDC9FD1C3A}</a:tableStyleId>
+              </a:tblPr>
+              <a:tblGrid>
+                <a:gridCol w="1926000"/>
+                <a:gridCol w="1926000"/>
+                <a:gridCol w="1926000"/>
+                <a:gridCol w="1926000"/>
+              </a:tblGrid>
+              <a:tr h="576000">
+                <a:tc>
+                  <a:txBody>
+                    <a:bodyPr/>
+                    <a:lstStyle/>
+                    <a:p>
+                      <a:r>
+                        <a:rPr sz="1400"/>
+                        <a:t>Договор</a:t>
+                      </a:r>
+                    </a:p>
+                  </a:txBody>
+                  <a:tcPr/>
+                </a:tc>
+                <a:tc>
+                  <a:txBody>
+                    <a:bodyPr/>
+                    <a:lstStyle/>
+                    <a:p>
+                      <a:r>
+                        <a:rPr sz="1400"/>
+                        <a:t>Контрагент</a:t>
+                      </a:r>
+                    </a:p>
+                  </a:txBody>
+                  <a:tcPr/>
+                </a:tc>
+                <a:tc>
+                  <a:txBody>
+                    <a:bodyPr/>
+                    <a:lstStyle/>
+                    <a:p>
+                      <a:r>
+                        <a:rPr sz="1400"/>
+                        <a:t>Сумма, BYN</a:t>
+                      </a:r>
+                    </a:p>
+                  </a:txBody>
+                  <a:tcPr/>
+                </a:tc>
+                <a:tc>
+                  <a:txBody>
+                    <a:bodyPr/>
+                    <a:lstStyle/>
+                    <a:p>
+                      <a:r>
+                        <a:rPr sz="1400"/>
+                        <a:t>Статус</a:t>
+                      </a:r>
+                    </a:p>
+                  </a:txBody>
+                  <a:tcPr/>
+                </a:tc>
+              </a:tr>
+              <a:tr h="576000">
+                <a:tc>
+                  <a:txBody>
+                    <a:bodyPr/>
+                    <a:lstStyle/>
+                    <a:p>
+                      <a:r>
+                        <a:rPr sz="1400"/>
+                        <a:t>№ 17/2024</a:t>
+                      </a:r>
+                    </a:p>
+                  </a:txBody>
+                  <a:tcPr/>
+                </a:tc>
+                <a:tc>
+                  <a:txBody>
+                    <a:bodyPr/>
+                    <a:lstStyle/>
+                    <a:p>
+                      <a:r>
+                        <a:rPr sz="1400"/>
+                        <a:t>ООО «Ромашка»</a:t>
+                      </a:r>
+                    </a:p>
+                  </a:txBody>
+                  <a:tcPr/>
+                </a:tc>
+                <a:tc>
+                  <a:txBody>
+                    <a:bodyPr/>
+                    <a:lstStyle/>
+                    <a:p>
+                      <a:r>
+                        <a:rPr sz="1400"/>
+                        <a:t>12 480,00</a:t>
+                      </a:r>
+                    </a:p>
+                  </a:txBody>
+                  <a:tcPr/>
+                </a:tc>
+                <a:tc>
+                  <a:txBody>
+                    <a:bodyPr/>
+                    <a:lstStyle/>
+                    <a:p>
+                      <a:r>
+                        <a:rPr sz="1400"/>
+                        <a:t>Действует</a:t>
+                      </a:r>
+                    </a:p>
+                  </a:txBody>
+                  <a:tcPr/>
+                </a:tc>
+              </a:tr>
+              <a:tr h="576000">
+                <a:tc>
+                  <a:txBody>
+                    <a:bodyPr/>
+                    <a:lstStyle/>
+                    <a:p>
+                      <a:r>
+                        <a:rPr sz="1400"/>
+                        <a:t>№ 18/2024</a:t>
+                      </a:r>
+                    </a:p>
+                  </a:txBody>
+                  <a:tcPr/>
+                </a:tc>
+                <a:tc>
+                  <a:txBody>
+                    <a:bodyPr/>
+                    <a:lstStyle/>
+                    <a:p>
+                      <a:r>
+                        <a:rPr sz="1400"/>
+                        <a:t>ИП Иванов И. И.</a:t>
+                      </a:r>
+                    </a:p>
+                  </a:txBody>
+                  <a:tcPr/>
+                </a:tc>
+                <a:tc>
+                  <a:txBody>
+                    <a:bodyPr/>
+                    <a:lstStyle/>
+                    <a:p>
+                      <a:r>
+                        <a:rPr sz="1400"/>
+                        <a:t>15 630,00</a:t>
+                      </a:r>
+                    </a:p>
+                  </a:txBody>
+                  <a:tcPr/>
+                </a:tc>
+                <a:tc>
+                  <a:txBody>
+                    <a:bodyPr/>
+                    <a:lstStyle/>
+                    <a:p>
+                      <a:r>
+                        <a:rPr sz="1400"/>
+                        <a:t>На согласовании</a:t>
+                      </a:r>
+                    </a:p>
+                  </a:txBody>
+                  <a:tcPr/>
+                </a:tc>
+              </a:tr>
+              <a:tr h="576000">
+                <a:tc>
+                  <a:txBody>
+                    <a:bodyPr/>
+                    <a:lstStyle/>
+                    <a:p>
+                      <a:r>
+                        <a:rPr sz="1400"/>
+                        <a:t>№ 19/2024</a:t>
+                      </a:r>
+                    </a:p>
+                  </a:txBody>
+                  <a:tcPr/>
+                </a:tc>
+                <a:tc>
+                  <a:txBody>
+                    <a:bodyPr/>
+                    <a:lstStyle/>
+                    <a:p>
+                      <a:r>
+                        <a:rPr sz="1400"/>
+                        <a:t>ООО «Василёк»</a:t>
+                      </a:r>
+                    </a:p>
+                  </a:txBody>
+                  <a:tcPr/>
+                </a:tc>
+                <a:tc>
+                  <a:txBody>
+                    <a:bodyPr/>
+                    <a:lstStyle/>
+                    <a:p>
+                      <a:r>
+                        <a:rPr sz="1400"/>
+                        <a:t>18 780,00</a:t>
+                      </a:r>
+                    </a:p>
+                  </a:txBody>
+                  <a:tcPr/>
+                </a:tc>
+                <a:tc>
+                  <a:txBody>
+                    <a:bodyPr/>
+                    <a:lstStyle/>
+                    <a:p>
+                      <a:r>
+                        <a:rPr sz="1400"/>
+                        <a:t>Завершён</a:t>
+                      </a:r>
+                    </a:p>
+                  </a:txBody>
+                  <a:tcPr/>
+                </a:tc>
+              </a:tr>
+              <a:tr h="576000">
+                <a:tc>
+                  <a:txBody>
+                    <a:bodyPr/>
+                    <a:lstStyle/>
+                    <a:p>
+                      <a:r>
+                        <a:rPr sz="1400"/>
+                        <a:t>№ 20/2024</a:t>
+                      </a:r>
+                    </a:p>
+                  </a:txBody>
+                  <a:tcPr/>
+                </a:tc>
+                <a:tc>
+                  <a:txBody>
+                    <a:bodyPr/>
+                    <a:lstStyle/>
+                    <a:p>
+                      <a:r>
+                        <a:rPr sz="1400"/>
+                        <a:t>ЗАО «Тестовый Мост»</a:t>
+                      </a:r>
+                    </a:p>
+                  </a:txBody>
+                  <a:tcPr/>
+                </a:tc>
+                <a:tc>
+                  <a:txBody>
+                    <a:bodyPr/>
+                    <a:lstStyle/>
+                    <a:p>
+                      <a:r>
+                        <a:rPr sz="1400"/>
+                        <a:t>21 930,00</a:t>
+                      </a:r>
+                    </a:p>
+                  </a:txBody>
+                  <a:tcPr/>
+                </a:tc>
+                <a:tc>
+                  <a:txBody>
+                    <a:bodyPr/>
+                    <a:lstStyle/>
+                    <a:p>
+                      <a:r>
+                        <a:rPr sz="1400"/>
+                        <a:t>Продлён</a:t>
+                      </a:r>
+                    </a:p>
+                  </a:txBody>
+                  <a:tcPr/>
+                </a:tc>
+              </a:tr>
+            </a:tbl>
+          </a:graphicData>
+        </a:graphic>
+      </p:graphicFrame>
     </p:spTree>
   </p:cSld>
   <p:clrMapOvr>

--- a/e2e/fixtures/files/deck-4x3.pptx
+++ b/e2e/fixtures/files/deck-4x3.pptx
@@ -3169,7 +3169,7 @@
           <a:lstStyle/>
           <a:p>
             <a:r>
-              <a:t>Итоги квартала</a:t>
+              <a:t>Итоги полугодия</a:t>
             </a:r>
           </a:p>
         </p:txBody>
@@ -3189,6 +3189,12 @@
           <a:bodyPr/>
           <a:lstStyle/>
           <a:p>
+            <a:r>
+              <a:t>Раздел 1. Ключевые показатели за период</a:t>
+            </a:r>
+          </a:p>
+          <a:p>
+            <a:pPr lvl="1"/>
             <a:r>
               <a:t>Выручка выросла на 12% к предыдущему кварталу</a:t>
             </a:r>
